--- a/outputs/ophthalmology-batch-20261011/ioi/A6_color_editable.pptx
+++ b/outputs/ophthalmology-batch-20261011/ioi/A6_color_editable.pptx
@@ -4062,7 +4062,7 @@
       </p:sp>
       <p:sp>
         <p:nvSpPr>
-          <p:cNvPr id="7" name="多数末次10 d内，高剂量抗VEGF有约1周/首次4周双峰〔强推荐〕。显著视力下降/畏光立即就诊；持"/>
+          <p:cNvPr id="7" name="多数末次10 d内，高剂量抗VEGF有末次1周内/首次约4周双峰〔强推荐〕。显著视力下降/畏光立即就"/>
           <p:cNvSpPr txBox="1"/>
           <p:nvPr/>
         </p:nvSpPr>
@@ -4102,7 +4102,7 @@
                 <a:ea typeface="Microsoft YaHei"/>
                 <a:cs typeface="Microsoft YaHei"/>
               </a:rPr>
-              <a:t>多数末次10 d内，高剂量抗VEGF有约1周/首次4周双峰〔强</a:t>
+              <a:t>多数末次10 d内，高剂量抗VEGF有末次1周内/首次约4周双</a:t>
             </a:r>
           </a:p>
           <a:p>
@@ -4126,7 +4126,7 @@
                 <a:ea typeface="Microsoft YaHei"/>
                 <a:cs typeface="Microsoft YaHei"/>
               </a:rPr>
-              <a:t>推荐〕。显著视力下降/畏光立即就诊；持续2 d以上不适或</a:t>
+              <a:t>峰〔强推荐〕。显著视力下降/畏光立即就诊；持续2 d以上</a:t>
             </a:r>
           </a:p>
           <a:p>
@@ -4150,7 +4150,7 @@
                 <a:ea typeface="Microsoft YaHei"/>
                 <a:cs typeface="Microsoft YaHei"/>
               </a:rPr>
-              <a:t>飞蚊及时就诊。</a:t>
+              <a:t>不适或飞蚊及时就诊。</a:t>
             </a:r>
           </a:p>
         </p:txBody>
@@ -4716,7 +4716,7 @@
       </p:sp>
       <p:sp>
         <p:nvSpPr>
-          <p:cNvPr id="19" name="第1天/1周/4周；确诊缩短至炎症静止。高危避免双眼同期；ST-TA不作常规预防〔中等推荐〕。"/>
+          <p:cNvPr id="19" name="第1天/1周/4周；确诊后强化随访至炎症静止。高危避免双眼同期；ST-TA不作常规预防〔中等推荐〕。"/>
           <p:cNvSpPr txBox="1"/>
           <p:nvPr/>
         </p:nvSpPr>
@@ -4756,7 +4756,7 @@
                 <a:ea typeface="Microsoft YaHei"/>
                 <a:cs typeface="Microsoft YaHei"/>
               </a:rPr>
-              <a:t>第1天/1周/4周；确诊缩短至炎症静止。高危避免双眼同期；</a:t>
+              <a:t>第1天/1周/4周；确诊后强化随访至炎症静止。高危避免双眼</a:t>
             </a:r>
           </a:p>
           <a:p>
@@ -4780,7 +4780,7 @@
                 <a:ea typeface="Microsoft YaHei"/>
                 <a:cs typeface="Microsoft YaHei"/>
               </a:rPr>
-              <a:t>ST-TA不作常规预防〔中等推荐〕。</a:t>
+              <a:t>同期；ST-TA不作常规预防〔中等推荐〕。</a:t>
             </a:r>
           </a:p>
         </p:txBody>
@@ -5482,7 +5482,7 @@
                 <a:ea typeface="Microsoft YaHei"/>
                 <a:cs typeface="Microsoft YaHei"/>
               </a:rPr>
-              <a:t>球内TA超说明书。</a:t>
+              <a:t>球内TA为超说明书用药。</a:t>
             </a:r>
           </a:p>
         </p:txBody>
@@ -5692,7 +5692,7 @@
                 <a:ea typeface="Microsoft YaHei"/>
                 <a:cs typeface="Microsoft YaHei"/>
               </a:rPr>
-              <a:t>注；TA相关者避免再玻璃体TA。普通SIOI激光待炎症消退后</a:t>
+              <a:t>注；TA相关者避免再玻璃体TA。普通SIOI激光须在炎症消退</a:t>
             </a:r>
           </a:p>
           <a:p>
@@ -5716,7 +5716,7 @@
                 <a:ea typeface="Microsoft YaHei"/>
                 <a:cs typeface="Microsoft YaHei"/>
               </a:rPr>
-              <a:t>适应证。</a:t>
+              <a:t>后按适应证。</a:t>
             </a:r>
           </a:p>
         </p:txBody>
